--- a/classes/parte-6-analisis-de-malware/146-analisis-con-ida-y-ghidra-aplicado-a-malware/clase-146-presentacion.pptx
+++ b/classes/parte-6-analisis-de-malware/146-analisis-con-ida-y-ghidra-aplicado-a-malware/clase-146-presentacion.pptx
@@ -17,6 +17,9 @@
     <p:sldId id="265" r:id="rId16"/>
     <p:sldId id="266" r:id="rId17"/>
     <p:sldId id="267" r:id="rId18"/>
+    <p:sldId id="268" r:id="rId19"/>
+    <p:sldId id="269" r:id="rId20"/>
+    <p:sldId id="270" r:id="rId21"/>
   </p:sldIdLst>
   <p:sldSz cx="9144000" cy="6858000" type="screen4x3"/>
   <p:notesSz cx="6858000" cy="9144000"/>
@@ -3198,7 +3201,7 @@
                   <a:srgbClr val="0B3D2E"/>
                 </a:solidFill>
               </a:rPr>
-              <a:t>⚠️ Errores comunes</a:t>
+              <a:t>✍️ Ejercicios</a:t>
             </a:r>
           </a:p>
         </p:txBody>
@@ -3236,67 +3239,82 @@
                   <a:srgbClr val="22282E"/>
                 </a:solidFill>
               </a:rPr>
-              <a:t>•  Decompilado incoherente — Muestra empaquetada; desempácala antes de desensamblar</a:t>
-            </a:r>
-          </a:p>
-          <a:p>
-            <a:pPr>
-              <a:spcAft>
-                <a:spcPts val="600"/>
-              </a:spcAft>
-            </a:pPr>
-            <a:r>
-              <a:rPr sz="1500">
-                <a:solidFill>
-                  <a:srgbClr val="22282E"/>
-                </a:solidFill>
-              </a:rPr>
-              <a:t>•  No aparece main — Runtime del compilador; localiza main desde WinMain/CRT</a:t>
-            </a:r>
-          </a:p>
-          <a:p>
-            <a:pPr>
-              <a:spcAft>
-                <a:spcPts val="600"/>
-              </a:spcAft>
-            </a:pPr>
-            <a:r>
-              <a:rPr sz="1500">
-                <a:solidFill>
-                  <a:srgbClr val="22282E"/>
-                </a:solidFill>
-              </a:rPr>
-              <a:t>•  Faltan nombres de API — API hashing o resolución dinámica; reconstruye la tabla</a:t>
-            </a:r>
-          </a:p>
-          <a:p>
-            <a:pPr>
-              <a:spcAft>
-                <a:spcPts val="600"/>
-              </a:spcAft>
-            </a:pPr>
-            <a:r>
-              <a:rPr sz="1500">
-                <a:solidFill>
-                  <a:srgbClr val="22282E"/>
-                </a:solidFill>
-              </a:rPr>
-              <a:t>•  Xrefs vacíos en un string — El string se construye en runtime; búscalo en el decompilado</a:t>
-            </a:r>
-          </a:p>
-          <a:p>
-            <a:pPr>
-              <a:spcAft>
-                <a:spcPts val="600"/>
-              </a:spcAft>
-            </a:pPr>
-            <a:r>
-              <a:rPr sz="1500">
-                <a:solidFill>
-                  <a:srgbClr val="22282E"/>
-                </a:solidFill>
-              </a:rPr>
-              <a:t>•  Perderse en el grafo — Trabaja desde strings/imports hacia dentro, no al revés</a:t>
+              <a:t>•  Explica la diferencia entre lo que ves en disasm y en el decompilador para una misma función.</a:t>
+            </a:r>
+          </a:p>
+          <a:p>
+            <a:pPr>
+              <a:spcAft>
+                <a:spcPts val="600"/>
+              </a:spcAft>
+            </a:pPr>
+            <a:r>
+              <a:rPr sz="1500">
+                <a:solidFill>
+                  <a:srgbClr val="22282E"/>
+                </a:solidFill>
+              </a:rPr>
+              <a:t>•  Usa xrefs para trazar el camino desde un string C2 hasta su envío por red.</a:t>
+            </a:r>
+          </a:p>
+          <a:p>
+            <a:pPr>
+              <a:spcAft>
+                <a:spcPts val="600"/>
+              </a:spcAft>
+            </a:pPr>
+            <a:r>
+              <a:rPr sz="1500">
+                <a:solidFill>
+                  <a:srgbClr val="22282E"/>
+                </a:solidFill>
+              </a:rPr>
+              <a:t>•  Reconoce y documenta un algoritmo simple de descifrado (XOR de un byte).</a:t>
+            </a:r>
+          </a:p>
+          <a:p>
+            <a:pPr>
+              <a:spcAft>
+                <a:spcPts val="600"/>
+              </a:spcAft>
+            </a:pPr>
+            <a:r>
+              <a:rPr sz="1500">
+                <a:solidFill>
+                  <a:srgbClr val="22282E"/>
+                </a:solidFill>
+              </a:rPr>
+              <a:t>•  Renombra 5 funciones y justifica cada nombre.</a:t>
+            </a:r>
+          </a:p>
+          <a:p>
+            <a:pPr>
+              <a:spcAft>
+                <a:spcPts val="600"/>
+              </a:spcAft>
+            </a:pPr>
+            <a:r>
+              <a:rPr sz="1500">
+                <a:solidFill>
+                  <a:srgbClr val="22282E"/>
+                </a:solidFill>
+              </a:rPr>
+              <a:t>•  Escribe un script Ghidra/IDAPython que liste todas las llamadas a GetProcAddress.</a:t>
+            </a:r>
+          </a:p>
+          <a:p>
+            <a:pPr>
+              <a:spcAft>
+                <a:spcPts val="600"/>
+              </a:spcAft>
+            </a:pPr>
+            <a:r>
+              <a:rPr sz="1500">
+                <a:solidFill>
+                  <a:srgbClr val="22282E"/>
+                </a:solidFill>
+              </a:rPr>
+              <a:t>•  Explica cómo el API hashing dificulta el análisis y cómo lo resolverías.</a:t>
             </a:r>
           </a:p>
         </p:txBody>
@@ -3347,7 +3365,7 @@
                   <a:srgbClr val="0B3D2E"/>
                 </a:solidFill>
               </a:rPr>
-              <a:t>❓ Preguntas frecuentes</a:t>
+              <a:t>📝 Reto verificable</a:t>
             </a:r>
           </a:p>
         </p:txBody>
@@ -3385,37 +3403,22 @@
                   <a:srgbClr val="22282E"/>
                 </a:solidFill>
               </a:rPr>
-              <a:t>•  ❓ ¿Ghidra o IDA? Ambos son excelentes. Ghidra es gratuito y su decompilador es muy bueno; IDA Pro es el estándar comercial. Aprende el flujo, no solo la herramienta.</a:t>
-            </a:r>
-          </a:p>
-          <a:p>
-            <a:pPr>
-              <a:spcAft>
-                <a:spcPts val="600"/>
-              </a:spcAft>
-            </a:pPr>
-            <a:r>
-              <a:rPr sz="1500">
-                <a:solidFill>
-                  <a:srgbClr val="22282E"/>
-                </a:solidFill>
-              </a:rPr>
-              <a:t>•  ❓ ¿Debo leer todo el binario? No. El análisis dirigido por objetivos (encontrar C2, cifrado, persistencia) es mucho más eficiente que leer linealmente.</a:t>
-            </a:r>
-          </a:p>
-          <a:p>
-            <a:pPr>
-              <a:spcAft>
-                <a:spcPts val="600"/>
-              </a:spcAft>
-            </a:pPr>
-            <a:r>
-              <a:rPr sz="1500">
-                <a:solidFill>
-                  <a:srgbClr val="22282E"/>
-                </a:solidFill>
-              </a:rPr>
-              <a:t>•  ❓ ¿Cómo trato el API hashing? Reconoce el algoritmo de hash, precomputa hashes de APIs comunes y mapea; hay scripts públicos que automatizan esto.</a:t>
+              <a:t>•  Entrega un proyecto de Ghidra anotado de una muestra con al menos 5 funciones renombradas, la rutina de C2 identificada y la configuración/IOCs extraídos del código, más un breve informe.</a:t>
+            </a:r>
+          </a:p>
+          <a:p>
+            <a:pPr>
+              <a:spcAft>
+                <a:spcPts val="600"/>
+              </a:spcAft>
+            </a:pPr>
+            <a:r>
+              <a:rPr sz="1500">
+                <a:solidFill>
+                  <a:srgbClr val="22282E"/>
+                </a:solidFill>
+              </a:rPr>
+              <a:t>•  Criterio de aceptación: otra persona puede abrir el proyecto y, siguiendo tus nombres y comentarios, explicar cómo la muestra contacta su C2 sin partir de cero.</a:t>
             </a:r>
           </a:p>
         </p:txBody>
@@ -3466,7 +3469,7 @@
                   <a:srgbClr val="0B3D2E"/>
                 </a:solidFill>
               </a:rPr>
-              <a:t>🔗 Referencias</a:t>
+              <a:t>⚠️ Errores comunes</a:t>
             </a:r>
           </a:p>
         </p:txBody>
@@ -3504,6 +3507,274 @@
                   <a:srgbClr val="22282E"/>
                 </a:solidFill>
               </a:rPr>
+              <a:t>•  Decompilado incoherente — Muestra empaquetada; desempácala antes de desensamblar</a:t>
+            </a:r>
+          </a:p>
+          <a:p>
+            <a:pPr>
+              <a:spcAft>
+                <a:spcPts val="600"/>
+              </a:spcAft>
+            </a:pPr>
+            <a:r>
+              <a:rPr sz="1500">
+                <a:solidFill>
+                  <a:srgbClr val="22282E"/>
+                </a:solidFill>
+              </a:rPr>
+              <a:t>•  No aparece main — Runtime del compilador; localiza main desde WinMain/CRT</a:t>
+            </a:r>
+          </a:p>
+          <a:p>
+            <a:pPr>
+              <a:spcAft>
+                <a:spcPts val="600"/>
+              </a:spcAft>
+            </a:pPr>
+            <a:r>
+              <a:rPr sz="1500">
+                <a:solidFill>
+                  <a:srgbClr val="22282E"/>
+                </a:solidFill>
+              </a:rPr>
+              <a:t>•  Faltan nombres de API — API hashing o resolución dinámica; reconstruye la tabla</a:t>
+            </a:r>
+          </a:p>
+          <a:p>
+            <a:pPr>
+              <a:spcAft>
+                <a:spcPts val="600"/>
+              </a:spcAft>
+            </a:pPr>
+            <a:r>
+              <a:rPr sz="1500">
+                <a:solidFill>
+                  <a:srgbClr val="22282E"/>
+                </a:solidFill>
+              </a:rPr>
+              <a:t>•  Xrefs vacíos en un string — El string se construye en runtime; búscalo en el decompilado</a:t>
+            </a:r>
+          </a:p>
+          <a:p>
+            <a:pPr>
+              <a:spcAft>
+                <a:spcPts val="600"/>
+              </a:spcAft>
+            </a:pPr>
+            <a:r>
+              <a:rPr sz="1500">
+                <a:solidFill>
+                  <a:srgbClr val="22282E"/>
+                </a:solidFill>
+              </a:rPr>
+              <a:t>•  Perderse en el grafo — Trabaja desde strings/imports hacia dentro, no al revés</a:t>
+            </a:r>
+          </a:p>
+        </p:txBody>
+      </p:sp>
+    </p:spTree>
+  </p:cSld>
+  <p:clrMapOvr>
+    <a:masterClrMapping/>
+  </p:clrMapOvr>
+</p:sld>
+</file>
+
+<file path=ppt/slides/slide13.xml><?xml version="1.0" encoding="utf-8"?>
+<p:sld xmlns:a="http://schemas.openxmlformats.org/drawingml/2006/main" xmlns:p="http://schemas.openxmlformats.org/presentationml/2006/main" xmlns:r="http://schemas.openxmlformats.org/officeDocument/2006/relationships">
+  <p:cSld>
+    <p:spTree>
+      <p:nvGrpSpPr>
+        <p:cNvPr id="1" name=""/>
+        <p:cNvGrpSpPr/>
+        <p:nvPr/>
+      </p:nvGrpSpPr>
+      <p:grpSpPr/>
+      <p:sp>
+        <p:nvSpPr>
+          <p:cNvPr id="2" name="TextBox 1"/>
+          <p:cNvSpPr txBox="1"/>
+          <p:nvPr/>
+        </p:nvSpPr>
+        <p:spPr>
+          <a:xfrm>
+            <a:off x="457200" y="320040"/>
+            <a:ext cx="8229600" cy="822960"/>
+          </a:xfrm>
+          <a:prstGeom prst="rect">
+            <a:avLst/>
+          </a:prstGeom>
+          <a:noFill/>
+        </p:spPr>
+        <p:txBody>
+          <a:bodyPr wrap="square">
+            <a:spAutoFit/>
+          </a:bodyPr>
+          <a:lstStyle/>
+          <a:p>
+            <a:r>
+              <a:rPr sz="2600" b="1">
+                <a:solidFill>
+                  <a:srgbClr val="0B3D2E"/>
+                </a:solidFill>
+              </a:rPr>
+              <a:t>❓ Preguntas frecuentes</a:t>
+            </a:r>
+          </a:p>
+        </p:txBody>
+      </p:sp>
+      <p:sp>
+        <p:nvSpPr>
+          <p:cNvPr id="3" name="TextBox 2"/>
+          <p:cNvSpPr txBox="1"/>
+          <p:nvPr/>
+        </p:nvSpPr>
+        <p:spPr>
+          <a:xfrm>
+            <a:off x="457200" y="1280160"/>
+            <a:ext cx="8229600" cy="4937760"/>
+          </a:xfrm>
+          <a:prstGeom prst="rect">
+            <a:avLst/>
+          </a:prstGeom>
+          <a:noFill/>
+        </p:spPr>
+        <p:txBody>
+          <a:bodyPr wrap="square">
+            <a:spAutoFit/>
+          </a:bodyPr>
+          <a:lstStyle/>
+          <a:p>
+            <a:pPr>
+              <a:spcAft>
+                <a:spcPts val="600"/>
+              </a:spcAft>
+            </a:pPr>
+            <a:r>
+              <a:rPr sz="1500">
+                <a:solidFill>
+                  <a:srgbClr val="22282E"/>
+                </a:solidFill>
+              </a:rPr>
+              <a:t>•  ❓ ¿Ghidra o IDA? Ambos son excelentes. Ghidra es gratuito y su decompilador es muy bueno; IDA Pro es el estándar comercial. Aprende el flujo, no solo la herramienta.</a:t>
+            </a:r>
+          </a:p>
+          <a:p>
+            <a:pPr>
+              <a:spcAft>
+                <a:spcPts val="600"/>
+              </a:spcAft>
+            </a:pPr>
+            <a:r>
+              <a:rPr sz="1500">
+                <a:solidFill>
+                  <a:srgbClr val="22282E"/>
+                </a:solidFill>
+              </a:rPr>
+              <a:t>•  ❓ ¿Debo leer todo el binario? No. El análisis dirigido por objetivos (encontrar C2, cifrado, persistencia) es mucho más eficiente que leer linealmente.</a:t>
+            </a:r>
+          </a:p>
+          <a:p>
+            <a:pPr>
+              <a:spcAft>
+                <a:spcPts val="600"/>
+              </a:spcAft>
+            </a:pPr>
+            <a:r>
+              <a:rPr sz="1500">
+                <a:solidFill>
+                  <a:srgbClr val="22282E"/>
+                </a:solidFill>
+              </a:rPr>
+              <a:t>•  ❓ ¿Cómo trato el API hashing? Reconoce el algoritmo de hash, precomputa hashes de APIs comunes y mapea; hay scripts públicos que automatizan esto.</a:t>
+            </a:r>
+          </a:p>
+        </p:txBody>
+      </p:sp>
+    </p:spTree>
+  </p:cSld>
+  <p:clrMapOvr>
+    <a:masterClrMapping/>
+  </p:clrMapOvr>
+</p:sld>
+</file>
+
+<file path=ppt/slides/slide14.xml><?xml version="1.0" encoding="utf-8"?>
+<p:sld xmlns:a="http://schemas.openxmlformats.org/drawingml/2006/main" xmlns:p="http://schemas.openxmlformats.org/presentationml/2006/main" xmlns:r="http://schemas.openxmlformats.org/officeDocument/2006/relationships">
+  <p:cSld>
+    <p:spTree>
+      <p:nvGrpSpPr>
+        <p:cNvPr id="1" name=""/>
+        <p:cNvGrpSpPr/>
+        <p:nvPr/>
+      </p:nvGrpSpPr>
+      <p:grpSpPr/>
+      <p:sp>
+        <p:nvSpPr>
+          <p:cNvPr id="2" name="TextBox 1"/>
+          <p:cNvSpPr txBox="1"/>
+          <p:nvPr/>
+        </p:nvSpPr>
+        <p:spPr>
+          <a:xfrm>
+            <a:off x="457200" y="320040"/>
+            <a:ext cx="8229600" cy="822960"/>
+          </a:xfrm>
+          <a:prstGeom prst="rect">
+            <a:avLst/>
+          </a:prstGeom>
+          <a:noFill/>
+        </p:spPr>
+        <p:txBody>
+          <a:bodyPr wrap="square">
+            <a:spAutoFit/>
+          </a:bodyPr>
+          <a:lstStyle/>
+          <a:p>
+            <a:r>
+              <a:rPr sz="2600" b="1">
+                <a:solidFill>
+                  <a:srgbClr val="0B3D2E"/>
+                </a:solidFill>
+              </a:rPr>
+              <a:t>🔗 Referencias</a:t>
+            </a:r>
+          </a:p>
+        </p:txBody>
+      </p:sp>
+      <p:sp>
+        <p:nvSpPr>
+          <p:cNvPr id="3" name="TextBox 2"/>
+          <p:cNvSpPr txBox="1"/>
+          <p:nvPr/>
+        </p:nvSpPr>
+        <p:spPr>
+          <a:xfrm>
+            <a:off x="457200" y="1280160"/>
+            <a:ext cx="8229600" cy="4937760"/>
+          </a:xfrm>
+          <a:prstGeom prst="rect">
+            <a:avLst/>
+          </a:prstGeom>
+          <a:noFill/>
+        </p:spPr>
+        <p:txBody>
+          <a:bodyPr wrap="square">
+            <a:spAutoFit/>
+          </a:bodyPr>
+          <a:lstStyle/>
+          <a:p>
+            <a:pPr>
+              <a:spcAft>
+                <a:spcPts val="600"/>
+              </a:spcAft>
+            </a:pPr>
+            <a:r>
+              <a:rPr sz="1500">
+                <a:solidFill>
+                  <a:srgbClr val="22282E"/>
+                </a:solidFill>
+              </a:rPr>
               <a:t>•  Sikorski &amp; Honig, Practical Malware Analysis, cap. 5–7.</a:t>
             </a:r>
           </a:p>
@@ -3554,6 +3825,81 @@
           </a:p>
         </p:txBody>
       </p:sp>
+    </p:spTree>
+  </p:cSld>
+  <p:clrMapOvr>
+    <a:masterClrMapping/>
+  </p:clrMapOvr>
+</p:sld>
+</file>
+
+<file path=ppt/slides/slide15.xml><?xml version="1.0" encoding="utf-8"?>
+<p:sld xmlns:a="http://schemas.openxmlformats.org/drawingml/2006/main" xmlns:p="http://schemas.openxmlformats.org/presentationml/2006/main" xmlns:r="http://schemas.openxmlformats.org/officeDocument/2006/relationships">
+  <p:cSld>
+    <p:spTree>
+      <p:nvGrpSpPr>
+        <p:cNvPr id="1" name=""/>
+        <p:cNvGrpSpPr/>
+        <p:nvPr/>
+      </p:nvGrpSpPr>
+      <p:grpSpPr/>
+      <p:sp>
+        <p:nvSpPr>
+          <p:cNvPr id="2" name="TextBox 1"/>
+          <p:cNvSpPr txBox="1"/>
+          <p:nvPr/>
+        </p:nvSpPr>
+        <p:spPr>
+          <a:xfrm>
+            <a:off x="457200" y="274320"/>
+            <a:ext cx="8229600" cy="640080"/>
+          </a:xfrm>
+          <a:prstGeom prst="rect">
+            <a:avLst/>
+          </a:prstGeom>
+          <a:noFill/>
+        </p:spPr>
+        <p:txBody>
+          <a:bodyPr wrap="square">
+            <a:spAutoFit/>
+          </a:bodyPr>
+          <a:lstStyle/>
+          <a:p>
+            <a:r>
+              <a:rPr sz="2200" b="1">
+                <a:solidFill>
+                  <a:srgbClr val="0B3D2E"/>
+                </a:solidFill>
+              </a:rPr>
+              <a:t>Diagrama de la clase</a:t>
+            </a:r>
+          </a:p>
+        </p:txBody>
+      </p:sp>
+      <p:pic>
+        <p:nvPicPr>
+          <p:cNvPr id="3" name="Picture 2" descr="f8cb62ca9b287afd.png"/>
+          <p:cNvPicPr>
+            <a:picLocks noChangeAspect="1"/>
+          </p:cNvPicPr>
+          <p:nvPr/>
+        </p:nvPicPr>
+        <p:blipFill>
+          <a:blip r:embed="rId2"/>
+          <a:stretch>
+            <a:fillRect/>
+          </a:stretch>
+        </p:blipFill>
+        <p:spPr>
+          <a:xfrm>
+            <a:off x="457200" y="2985516"/>
+            <a:ext cx="8229600" cy="1527048"/>
+          </a:xfrm>
+          <a:prstGeom prst="rect">
+            <a:avLst/>
+          </a:prstGeom>
+        </p:spPr>
+      </p:pic>
     </p:spTree>
   </p:cSld>
   <p:clrMapOvr>
@@ -3638,7 +3984,7 @@
                   <a:srgbClr val="22282E"/>
                 </a:solidFill>
               </a:rPr>
-              <a:t>•  Usar un desensamblador/decompilador para leer el código del malware y reconstruir su lógica: identificar la función main, seguir el grafo de llamadas, reconocer patrones de APIs, renombrar y anotar, y llegar al decompilado en pseudo-C. Ghidra (gratuito) e IDA son las herramientas centrales del análisis estático avanzado.</a:t>
+              <a:t>•  Usar un desensamblador/decompilador para leer el código del malware y reconstruir su lógica: identificar la función main, seguir el grafo de llamadas, reconocer patrones de APIs, renombrar y anotar…</a:t>
             </a:r>
           </a:p>
         </p:txBody>
@@ -4032,7 +4378,7 @@
                   <a:srgbClr val="0B3D2E"/>
                 </a:solidFill>
               </a:rPr>
-              <a:t>📖 Definiciones y características</a:t>
+              <a:t>🧠 Explicación en profundidad</a:t>
             </a:r>
           </a:p>
         </p:txBody>
@@ -4070,67 +4416,97 @@
                   <a:srgbClr val="22282E"/>
                 </a:solidFill>
               </a:rPr>
-              <a:t>•  Desensamblado: traducción de bytes a instrucciones ASM. Característica clave: vista exacta de la ejecución.</a:t>
-            </a:r>
-          </a:p>
-          <a:p>
-            <a:pPr>
-              <a:spcAft>
-                <a:spcPts val="600"/>
-              </a:spcAft>
-            </a:pPr>
-            <a:r>
-              <a:rPr sz="1500">
-                <a:solidFill>
-                  <a:srgbClr val="22282E"/>
-                </a:solidFill>
-              </a:rPr>
-              <a:t>•  Decompilador: reconstruye pseudo-C desde el ASM. Característica clave: lectura rápida, aproximada.</a:t>
-            </a:r>
-          </a:p>
-          <a:p>
-            <a:pPr>
-              <a:spcAft>
-                <a:spcPts val="600"/>
-              </a:spcAft>
-            </a:pPr>
-            <a:r>
-              <a:rPr sz="1500">
-                <a:solidFill>
-                  <a:srgbClr val="22282E"/>
-                </a:solidFill>
-              </a:rPr>
-              <a:t>•  Xref: referencia cruzada a una dirección/símbolo. Característica clave: navegación por uso.</a:t>
-            </a:r>
-          </a:p>
-          <a:p>
-            <a:pPr>
-              <a:spcAft>
-                <a:spcPts val="600"/>
-              </a:spcAft>
-            </a:pPr>
-            <a:r>
-              <a:rPr sz="1500">
-                <a:solidFill>
-                  <a:srgbClr val="22282E"/>
-                </a:solidFill>
-              </a:rPr>
-              <a:t>•  Resolución dinámica de API: LoadLibrary+GetProcAddress en runtime. Característica clave: oculta capacidades al análisis estático.</a:t>
-            </a:r>
-          </a:p>
-          <a:p>
-            <a:pPr>
-              <a:spcAft>
-                <a:spcPts val="600"/>
-              </a:spcAft>
-            </a:pPr>
-            <a:r>
-              <a:rPr sz="1500">
-                <a:solidFill>
-                  <a:srgbClr val="22282E"/>
-                </a:solidFill>
-              </a:rPr>
-              <a:t>•  API hashing: resolver APIs por hash del nombre. Característica clave: evasión de detección por strings.</a:t>
+              <a:t>•  El análisis estático avanzado —desensamblar y decompilar la muestra con IDA o Ghidra ([Clases</a:t>
+            </a:r>
+          </a:p>
+          <a:p>
+            <a:pPr>
+              <a:spcAft>
+                <a:spcPts val="600"/>
+              </a:spcAft>
+            </a:pPr>
+            <a:r>
+              <a:rPr sz="1500">
+                <a:solidFill>
+                  <a:srgbClr val="22282E"/>
+                </a:solidFill>
+              </a:rPr>
+              <a:t>•  131–132](../../parte-5-explotacion-de-sistemas-y-binarios/131-ghidra-para-ingenieria-inversa/README.md))— es el nivel más profundo y costoso del análisis de malware, y se recurre a él</a:t>
+            </a:r>
+          </a:p>
+          <a:p>
+            <a:pPr>
+              <a:spcAft>
+                <a:spcPts val="600"/>
+              </a:spcAft>
+            </a:pPr>
+            <a:r>
+              <a:rPr sz="1500">
+                <a:solidFill>
+                  <a:srgbClr val="22282E"/>
+                </a:solidFill>
+              </a:rPr>
+              <a:t>•  cuando las preguntas exigen entender exactamente qué hace el código: cómo cifra un ransomware, qué</a:t>
+            </a:r>
+          </a:p>
+          <a:p>
+            <a:pPr>
+              <a:spcAft>
+                <a:spcPts val="600"/>
+              </a:spcAft>
+            </a:pPr>
+            <a:r>
+              <a:rPr sz="1500">
+                <a:solidFill>
+                  <a:srgbClr val="22282E"/>
+                </a:solidFill>
+              </a:rPr>
+              <a:t>•  algoritmo usa un DGA, cómo desofusca sus cadenas, qué condiciones activan una rama. La ingeniería</a:t>
+            </a:r>
+          </a:p>
+          <a:p>
+            <a:pPr>
+              <a:spcAft>
+                <a:spcPts val="600"/>
+              </a:spcAft>
+            </a:pPr>
+            <a:r>
+              <a:rPr sz="1500">
+                <a:solidFill>
+                  <a:srgbClr val="22282E"/>
+                </a:solidFill>
+              </a:rPr>
+              <a:t>•  inversa de la Parte 5 se aplica aquí, pero con un adversario que quiere dificultar el análisis, de</a:t>
+            </a:r>
+          </a:p>
+          <a:p>
+            <a:pPr>
+              <a:spcAft>
+                <a:spcPts val="600"/>
+              </a:spcAft>
+            </a:pPr>
+            <a:r>
+              <a:rPr sz="1500">
+                <a:solidFill>
+                  <a:srgbClr val="22282E"/>
+                </a:solidFill>
+              </a:rPr>
+              <a:t>•  ahí las técnicas específicas de esta clase.</a:t>
+            </a:r>
+          </a:p>
+          <a:p>
+            <a:pPr>
+              <a:spcAft>
+                <a:spcPts val="600"/>
+              </a:spcAft>
+            </a:pPr>
+            <a:r>
+              <a:rPr sz="1500">
+                <a:solidFill>
+                  <a:srgbClr val="22282E"/>
+                </a:solidFill>
+              </a:rPr>
+              <a:t>•  El trabajo empieza como en la Parte 5: cargar la muestra (ya desempaquetada, clase 147, si estaba</a:t>
             </a:r>
           </a:p>
         </p:txBody>
@@ -4181,7 +4557,7 @@
                   <a:srgbClr val="0B3D2E"/>
                 </a:solidFill>
               </a:rPr>
-              <a:t>🧰 Herramientas y preparación</a:t>
+              <a:t>📖 Definiciones y características</a:t>
             </a:r>
           </a:p>
         </p:txBody>
@@ -4219,52 +4595,67 @@
                   <a:srgbClr val="22282E"/>
                 </a:solidFill>
               </a:rPr>
-              <a:t>•  Ghidra (NSA, gratuito) con su decompilador integrado.</a:t>
-            </a:r>
-          </a:p>
-          <a:p>
-            <a:pPr>
-              <a:spcAft>
-                <a:spcPts val="600"/>
-              </a:spcAft>
-            </a:pPr>
-            <a:r>
-              <a:rPr sz="1500">
-                <a:solidFill>
-                  <a:srgbClr val="22282E"/>
-                </a:solidFill>
-              </a:rPr>
-              <a:t>•  IDA Free/Pro con Hex-Rays (si se dispone).</a:t>
-            </a:r>
-          </a:p>
-          <a:p>
-            <a:pPr>
-              <a:spcAft>
-                <a:spcPts val="600"/>
-              </a:spcAft>
-            </a:pPr>
-            <a:r>
-              <a:rPr sz="1500">
-                <a:solidFill>
-                  <a:srgbClr val="22282E"/>
-                </a:solidFill>
-              </a:rPr>
-              <a:t>•  x64dbg para correlacionar estático con dinámico (clase posterior).</a:t>
-            </a:r>
-          </a:p>
-          <a:p>
-            <a:pPr>
-              <a:spcAft>
-                <a:spcPts val="600"/>
-              </a:spcAft>
-            </a:pPr>
-            <a:r>
-              <a:rPr sz="1500">
-                <a:solidFill>
-                  <a:srgbClr val="22282E"/>
-                </a:solidFill>
-              </a:rPr>
-              <a:t>•  Scripts: Ghidra Scripts, IDAPython, y plugins como capa explorer.</a:t>
+              <a:t>•  Desensamblado: traducción de bytes a instrucciones ASM. Característica clave: vista exacta de la ejecución.</a:t>
+            </a:r>
+          </a:p>
+          <a:p>
+            <a:pPr>
+              <a:spcAft>
+                <a:spcPts val="600"/>
+              </a:spcAft>
+            </a:pPr>
+            <a:r>
+              <a:rPr sz="1500">
+                <a:solidFill>
+                  <a:srgbClr val="22282E"/>
+                </a:solidFill>
+              </a:rPr>
+              <a:t>•  Decompilador: reconstruye pseudo-C desde el ASM. Característica clave: lectura rápida, aproximada.</a:t>
+            </a:r>
+          </a:p>
+          <a:p>
+            <a:pPr>
+              <a:spcAft>
+                <a:spcPts val="600"/>
+              </a:spcAft>
+            </a:pPr>
+            <a:r>
+              <a:rPr sz="1500">
+                <a:solidFill>
+                  <a:srgbClr val="22282E"/>
+                </a:solidFill>
+              </a:rPr>
+              <a:t>•  Xref: referencia cruzada a una dirección/símbolo. Característica clave: navegación por uso.</a:t>
+            </a:r>
+          </a:p>
+          <a:p>
+            <a:pPr>
+              <a:spcAft>
+                <a:spcPts val="600"/>
+              </a:spcAft>
+            </a:pPr>
+            <a:r>
+              <a:rPr sz="1500">
+                <a:solidFill>
+                  <a:srgbClr val="22282E"/>
+                </a:solidFill>
+              </a:rPr>
+              <a:t>•  Resolución dinámica de API: LoadLibrary+GetProcAddress en runtime. Característica clave: oculta capacidades al análisis estático.</a:t>
+            </a:r>
+          </a:p>
+          <a:p>
+            <a:pPr>
+              <a:spcAft>
+                <a:spcPts val="600"/>
+              </a:spcAft>
+            </a:pPr>
+            <a:r>
+              <a:rPr sz="1500">
+                <a:solidFill>
+                  <a:srgbClr val="22282E"/>
+                </a:solidFill>
+              </a:rPr>
+              <a:t>•  API hashing: resolver APIs por hash del nombre. Característica clave: evasión de detección por strings.</a:t>
             </a:r>
           </a:p>
         </p:txBody>
@@ -4315,7 +4706,7 @@
                   <a:srgbClr val="0B3D2E"/>
                 </a:solidFill>
               </a:rPr>
-              <a:t>🧪 Laboratorio guiado</a:t>
+              <a:t>📔 Glosario</a:t>
             </a:r>
           </a:p>
         </p:txBody>
@@ -4353,97 +4744,97 @@
                   <a:srgbClr val="22282E"/>
                 </a:solidFill>
               </a:rPr>
-              <a:t>•  Crea un proyecto en Ghidra e importa la muestra. Deja que el auto-análisis termine.</a:t>
-            </a:r>
-          </a:p>
-          <a:p>
-            <a:pPr>
-              <a:spcAft>
-                <a:spcPts val="600"/>
-              </a:spcAft>
-            </a:pPr>
-            <a:r>
-              <a:rPr sz="1500">
-                <a:solidFill>
-                  <a:srgbClr val="22282E"/>
-                </a:solidFill>
-              </a:rPr>
-              <a:t>•  En la ventana de Symbol Tree/Functions, localiza el entry point y navega hasta la función que parece main.</a:t>
-            </a:r>
-          </a:p>
-          <a:p>
-            <a:pPr>
-              <a:spcAft>
-                <a:spcPts val="600"/>
-              </a:spcAft>
-            </a:pPr>
-            <a:r>
-              <a:rPr sz="1500">
-                <a:solidFill>
-                  <a:srgbClr val="22282E"/>
-                </a:solidFill>
-              </a:rPr>
-              <a:t>•  Abre Defined Strings. Elige un string revelador (URL, mensaje, clave de registro) y usa xref para saltar a la función que lo usa.</a:t>
-            </a:r>
-          </a:p>
-          <a:p>
-            <a:pPr>
-              <a:spcAft>
-                <a:spcPts val="600"/>
-              </a:spcAft>
-            </a:pPr>
-            <a:r>
-              <a:rPr sz="1500">
-                <a:solidFill>
-                  <a:srgbClr val="22282E"/>
-                </a:solidFill>
-              </a:rPr>
-              <a:t>•  Estudia esa función en el decompilador. Renómbrala (p. ej. contactc2) y comenta el propósito de sus variables.</a:t>
-            </a:r>
-          </a:p>
-          <a:p>
-            <a:pPr>
-              <a:spcAft>
-                <a:spcPts val="600"/>
-              </a:spcAft>
-            </a:pPr>
-            <a:r>
-              <a:rPr sz="1500">
-                <a:solidFill>
-                  <a:srgbClr val="22282E"/>
-                </a:solidFill>
-              </a:rPr>
-              <a:t>•  Busca imports sospechosos (InternetConnect, CryptEncrypt, CreateRemoteThread) y desde ellos sigue xrefs a las rutinas que los invocan.</a:t>
-            </a:r>
-          </a:p>
-          <a:p>
-            <a:pPr>
-              <a:spcAft>
-                <a:spcPts val="600"/>
-              </a:spcAft>
-            </a:pPr>
-            <a:r>
-              <a:rPr sz="1500">
-                <a:solidFill>
-                  <a:srgbClr val="22282E"/>
-                </a:solidFill>
-              </a:rPr>
-              <a:t>•  Si la IAT está casi vacía, localiza el patrón GetProcAddress/API hashing y documenta cómo resuelve funciones.</a:t>
-            </a:r>
-          </a:p>
-          <a:p>
-            <a:pPr>
-              <a:spcAft>
-                <a:spcPts val="600"/>
-              </a:spcAft>
-            </a:pPr>
-            <a:r>
-              <a:rPr sz="1500">
-                <a:solidFill>
-                  <a:srgbClr val="22282E"/>
-                </a:solidFill>
-              </a:rPr>
-              <a:t>•  Identifica un posible bucle de descifrado de configuración: reconoce XOR/rotaciones y anota la clave.</a:t>
+              <a:t>•  Término — Definición concisa</a:t>
+            </a:r>
+          </a:p>
+          <a:p>
+            <a:pPr>
+              <a:spcAft>
+                <a:spcPts val="600"/>
+              </a:spcAft>
+            </a:pPr>
+            <a:r>
+              <a:rPr sz="1500">
+                <a:solidFill>
+                  <a:srgbClr val="22282E"/>
+                </a:solidFill>
+              </a:rPr>
+              <a:t>•  Análisis estático avanzado — Desensamblar y decompilar la muestra</a:t>
+            </a:r>
+          </a:p>
+          <a:p>
+            <a:pPr>
+              <a:spcAft>
+                <a:spcPts val="600"/>
+              </a:spcAft>
+            </a:pPr>
+            <a:r>
+              <a:rPr sz="1500">
+                <a:solidFill>
+                  <a:srgbClr val="22282E"/>
+                </a:solidFill>
+              </a:rPr>
+              <a:t>•  Auto-análisis — Identificación automática de funciones</a:t>
+            </a:r>
+          </a:p>
+          <a:p>
+            <a:pPr>
+              <a:spcAft>
+                <a:spcPts val="600"/>
+              </a:spcAft>
+            </a:pPr>
+            <a:r>
+              <a:rPr sz="1500">
+                <a:solidFill>
+                  <a:srgbClr val="22282E"/>
+                </a:solidFill>
+              </a:rPr>
+              <a:t>•  Dirigido por objetivos — Buscar responder una pregunta, no leer todo</a:t>
+            </a:r>
+          </a:p>
+          <a:p>
+            <a:pPr>
+              <a:spcAft>
+                <a:spcPts val="600"/>
+              </a:spcAft>
+            </a:pPr>
+            <a:r>
+              <a:rPr sz="1500">
+                <a:solidFill>
+                  <a:srgbClr val="22282E"/>
+                </a:solidFill>
+              </a:rPr>
+              <a:t>•  Xref — Referencia cruzada: quién llama a algo</a:t>
+            </a:r>
+          </a:p>
+          <a:p>
+            <a:pPr>
+              <a:spcAft>
+                <a:spcPts val="600"/>
+              </a:spcAft>
+            </a:pPr>
+            <a:r>
+              <a:rPr sz="1500">
+                <a:solidFill>
+                  <a:srgbClr val="22282E"/>
+                </a:solidFill>
+              </a:rPr>
+              <a:t>•  API de Windows — Interfaz por la que el malware habla con el SO</a:t>
+            </a:r>
+          </a:p>
+          <a:p>
+            <a:pPr>
+              <a:spcAft>
+                <a:spcPts val="600"/>
+              </a:spcAft>
+            </a:pPr>
+            <a:r>
+              <a:rPr sz="1500">
+                <a:solidFill>
+                  <a:srgbClr val="22282E"/>
+                </a:solidFill>
+              </a:rPr>
+              <a:t>•  Patrón de APIs — Combinación que revela una técnica conocida</a:t>
             </a:r>
           </a:p>
         </p:txBody>
@@ -4494,7 +4885,7 @@
                   <a:srgbClr val="0B3D2E"/>
                 </a:solidFill>
               </a:rPr>
-              <a:t>✍️ Ejercicios</a:t>
+              <a:t>🧰 Herramientas y preparación</a:t>
             </a:r>
           </a:p>
         </p:txBody>
@@ -4532,82 +4923,52 @@
                   <a:srgbClr val="22282E"/>
                 </a:solidFill>
               </a:rPr>
-              <a:t>•  Explica la diferencia entre lo que ves en disasm y en el decompilador para una misma función.</a:t>
-            </a:r>
-          </a:p>
-          <a:p>
-            <a:pPr>
-              <a:spcAft>
-                <a:spcPts val="600"/>
-              </a:spcAft>
-            </a:pPr>
-            <a:r>
-              <a:rPr sz="1500">
-                <a:solidFill>
-                  <a:srgbClr val="22282E"/>
-                </a:solidFill>
-              </a:rPr>
-              <a:t>•  Usa xrefs para trazar el camino desde un string C2 hasta su envío por red.</a:t>
-            </a:r>
-          </a:p>
-          <a:p>
-            <a:pPr>
-              <a:spcAft>
-                <a:spcPts val="600"/>
-              </a:spcAft>
-            </a:pPr>
-            <a:r>
-              <a:rPr sz="1500">
-                <a:solidFill>
-                  <a:srgbClr val="22282E"/>
-                </a:solidFill>
-              </a:rPr>
-              <a:t>•  Reconoce y documenta un algoritmo simple de descifrado (XOR de un byte).</a:t>
-            </a:r>
-          </a:p>
-          <a:p>
-            <a:pPr>
-              <a:spcAft>
-                <a:spcPts val="600"/>
-              </a:spcAft>
-            </a:pPr>
-            <a:r>
-              <a:rPr sz="1500">
-                <a:solidFill>
-                  <a:srgbClr val="22282E"/>
-                </a:solidFill>
-              </a:rPr>
-              <a:t>•  Renombra 5 funciones y justifica cada nombre.</a:t>
-            </a:r>
-          </a:p>
-          <a:p>
-            <a:pPr>
-              <a:spcAft>
-                <a:spcPts val="600"/>
-              </a:spcAft>
-            </a:pPr>
-            <a:r>
-              <a:rPr sz="1500">
-                <a:solidFill>
-                  <a:srgbClr val="22282E"/>
-                </a:solidFill>
-              </a:rPr>
-              <a:t>•  Escribe un script Ghidra/IDAPython que liste todas las llamadas a GetProcAddress.</a:t>
-            </a:r>
-          </a:p>
-          <a:p>
-            <a:pPr>
-              <a:spcAft>
-                <a:spcPts val="600"/>
-              </a:spcAft>
-            </a:pPr>
-            <a:r>
-              <a:rPr sz="1500">
-                <a:solidFill>
-                  <a:srgbClr val="22282E"/>
-                </a:solidFill>
-              </a:rPr>
-              <a:t>•  Explica cómo el API hashing dificulta el análisis y cómo lo resolverías.</a:t>
+              <a:t>•  Ghidra (NSA, gratuito) con su decompilador integrado.</a:t>
+            </a:r>
+          </a:p>
+          <a:p>
+            <a:pPr>
+              <a:spcAft>
+                <a:spcPts val="600"/>
+              </a:spcAft>
+            </a:pPr>
+            <a:r>
+              <a:rPr sz="1500">
+                <a:solidFill>
+                  <a:srgbClr val="22282E"/>
+                </a:solidFill>
+              </a:rPr>
+              <a:t>•  IDA Free/Pro con Hex-Rays (si se dispone).</a:t>
+            </a:r>
+          </a:p>
+          <a:p>
+            <a:pPr>
+              <a:spcAft>
+                <a:spcPts val="600"/>
+              </a:spcAft>
+            </a:pPr>
+            <a:r>
+              <a:rPr sz="1500">
+                <a:solidFill>
+                  <a:srgbClr val="22282E"/>
+                </a:solidFill>
+              </a:rPr>
+              <a:t>•  x64dbg para correlacionar estático con dinámico (clase posterior).</a:t>
+            </a:r>
+          </a:p>
+          <a:p>
+            <a:pPr>
+              <a:spcAft>
+                <a:spcPts val="600"/>
+              </a:spcAft>
+            </a:pPr>
+            <a:r>
+              <a:rPr sz="1500">
+                <a:solidFill>
+                  <a:srgbClr val="22282E"/>
+                </a:solidFill>
+              </a:rPr>
+              <a:t>•  Scripts: Ghidra Scripts, IDAPython, y plugins como capa explorer.</a:t>
             </a:r>
           </a:p>
         </p:txBody>
@@ -4658,7 +5019,7 @@
                   <a:srgbClr val="0B3D2E"/>
                 </a:solidFill>
               </a:rPr>
-              <a:t>📝 Reto verificable</a:t>
+              <a:t>🧪 Laboratorio guiado</a:t>
             </a:r>
           </a:p>
         </p:txBody>
@@ -4696,22 +5057,97 @@
                   <a:srgbClr val="22282E"/>
                 </a:solidFill>
               </a:rPr>
-              <a:t>•  Entrega un proyecto de Ghidra anotado de una muestra con al menos 5 funciones renombradas, la rutina de C2 identificada y la configuración/IOCs extraídos del código, más un breve informe.</a:t>
-            </a:r>
-          </a:p>
-          <a:p>
-            <a:pPr>
-              <a:spcAft>
-                <a:spcPts val="600"/>
-              </a:spcAft>
-            </a:pPr>
-            <a:r>
-              <a:rPr sz="1500">
-                <a:solidFill>
-                  <a:srgbClr val="22282E"/>
-                </a:solidFill>
-              </a:rPr>
-              <a:t>•  Criterio de aceptación: otra persona puede abrir el proyecto y, siguiendo tus nombres y comentarios, explicar cómo la muestra contacta su C2 sin partir de cero.</a:t>
+              <a:t>•  Crea un proyecto en Ghidra e importa la muestra. Deja que el auto-análisis termine.</a:t>
+            </a:r>
+          </a:p>
+          <a:p>
+            <a:pPr>
+              <a:spcAft>
+                <a:spcPts val="600"/>
+              </a:spcAft>
+            </a:pPr>
+            <a:r>
+              <a:rPr sz="1500">
+                <a:solidFill>
+                  <a:srgbClr val="22282E"/>
+                </a:solidFill>
+              </a:rPr>
+              <a:t>•  En la ventana de Symbol Tree/Functions, localiza el entry point y navega hasta la función que parece main.</a:t>
+            </a:r>
+          </a:p>
+          <a:p>
+            <a:pPr>
+              <a:spcAft>
+                <a:spcPts val="600"/>
+              </a:spcAft>
+            </a:pPr>
+            <a:r>
+              <a:rPr sz="1500">
+                <a:solidFill>
+                  <a:srgbClr val="22282E"/>
+                </a:solidFill>
+              </a:rPr>
+              <a:t>•  Abre Defined Strings. Elige un string revelador (URL, mensaje, clave de registro) y usa xref para saltar a la función que lo usa.</a:t>
+            </a:r>
+          </a:p>
+          <a:p>
+            <a:pPr>
+              <a:spcAft>
+                <a:spcPts val="600"/>
+              </a:spcAft>
+            </a:pPr>
+            <a:r>
+              <a:rPr sz="1500">
+                <a:solidFill>
+                  <a:srgbClr val="22282E"/>
+                </a:solidFill>
+              </a:rPr>
+              <a:t>•  Estudia esa función en el decompilador. Renómbrala (p. ej. contactc2) y comenta el propósito de sus variables.</a:t>
+            </a:r>
+          </a:p>
+          <a:p>
+            <a:pPr>
+              <a:spcAft>
+                <a:spcPts val="600"/>
+              </a:spcAft>
+            </a:pPr>
+            <a:r>
+              <a:rPr sz="1500">
+                <a:solidFill>
+                  <a:srgbClr val="22282E"/>
+                </a:solidFill>
+              </a:rPr>
+              <a:t>•  Busca imports sospechosos (InternetConnect, CryptEncrypt, CreateRemoteThread) y desde ellos sigue xrefs a las rutinas que los invocan.</a:t>
+            </a:r>
+          </a:p>
+          <a:p>
+            <a:pPr>
+              <a:spcAft>
+                <a:spcPts val="600"/>
+              </a:spcAft>
+            </a:pPr>
+            <a:r>
+              <a:rPr sz="1500">
+                <a:solidFill>
+                  <a:srgbClr val="22282E"/>
+                </a:solidFill>
+              </a:rPr>
+              <a:t>•  Si la IAT está casi vacía, localiza el patrón GetProcAddress/API hashing y documenta cómo resuelve funciones.</a:t>
+            </a:r>
+          </a:p>
+          <a:p>
+            <a:pPr>
+              <a:spcAft>
+                <a:spcPts val="600"/>
+              </a:spcAft>
+            </a:pPr>
+            <a:r>
+              <a:rPr sz="1500">
+                <a:solidFill>
+                  <a:srgbClr val="22282E"/>
+                </a:solidFill>
+              </a:rPr>
+              <a:t>•  Identifica un posible bucle de descifrado de configuración: reconoce XOR/rotaciones y anota la clave.</a:t>
             </a:r>
           </a:p>
         </p:txBody>
